--- a/presentations/module2_presentation.pptx
+++ b/presentations/module2_presentation.pptx
@@ -7764,7 +7764,7 @@
                 </a:solidFill>
                 <a:latin typeface="Calibri"/>
               </a:rPr>
-              <a:t>https://github.com/&lt;your-github-username&gt;/module2-numerical-surrogate-antenna-design</a:t>
+              <a:t>https://github.com/rathiabeth/module2-numerical-surrogate-antenna-design</a:t>
             </a:r>
           </a:p>
         </p:txBody>

--- a/presentations/module2_presentation.pptx
+++ b/presentations/module2_presentation.pptx
@@ -7764,7 +7764,7 @@
                 </a:solidFill>
                 <a:latin typeface="Calibri"/>
               </a:rPr>
-              <a:t>https://github.com/rathiabeth/module2-numerical-surrogate-antenna-design</a:t>
+              <a:t>https://github.com/rathiabeth-sudo/902---Module-2</a:t>
             </a:r>
           </a:p>
         </p:txBody>
